--- a/presentation.pptx
+++ b/presentation.pptx
@@ -111,6 +111,11 @@
       </a:defRPr>
     </a:lvl9pPr>
   </p:defaultTextStyle>
+  <p:extLst>
+    <p:ext uri="{EFAFB233-063F-42B5-8137-9DF3F51BA10A}">
+      <p15:sldGuideLst xmlns:p15="http://schemas.microsoft.com/office/powerpoint/2012/main"/>
+    </p:ext>
+  </p:extLst>
 </p:presentation>
 </file>
 
@@ -327,7 +332,7 @@
           <a:p>
             <a:fld id="{8C9D345C-3030-4E84-9DC8-AD7BC6D763D1}" type="datetimeFigureOut">
               <a:rPr lang="en-IN" smtClean="0"/>
-              <a:t>19-04-2026</a:t>
+              <a:t>20-04-2026</a:t>
             </a:fld>
             <a:endParaRPr lang="en-IN"/>
           </a:p>
@@ -618,7 +623,7 @@
           <a:p>
             <a:fld id="{8C9D345C-3030-4E84-9DC8-AD7BC6D763D1}" type="datetimeFigureOut">
               <a:rPr lang="en-IN" smtClean="0"/>
-              <a:t>19-04-2026</a:t>
+              <a:t>20-04-2026</a:t>
             </a:fld>
             <a:endParaRPr lang="en-IN"/>
           </a:p>
@@ -877,7 +882,7 @@
           <a:p>
             <a:fld id="{8C9D345C-3030-4E84-9DC8-AD7BC6D763D1}" type="datetimeFigureOut">
               <a:rPr lang="en-IN" smtClean="0"/>
-              <a:t>19-04-2026</a:t>
+              <a:t>20-04-2026</a:t>
             </a:fld>
             <a:endParaRPr lang="en-IN"/>
           </a:p>
@@ -1346,7 +1351,7 @@
           <a:p>
             <a:fld id="{8C9D345C-3030-4E84-9DC8-AD7BC6D763D1}" type="datetimeFigureOut">
               <a:rPr lang="en-IN" smtClean="0"/>
-              <a:t>19-04-2026</a:t>
+              <a:t>20-04-2026</a:t>
             </a:fld>
             <a:endParaRPr lang="en-IN"/>
           </a:p>
@@ -1526,7 +1531,7 @@
           <a:p>
             <a:fld id="{8C9D345C-3030-4E84-9DC8-AD7BC6D763D1}" type="datetimeFigureOut">
               <a:rPr lang="en-IN" smtClean="0"/>
-              <a:t>19-04-2026</a:t>
+              <a:t>20-04-2026</a:t>
             </a:fld>
             <a:endParaRPr lang="en-IN"/>
           </a:p>
@@ -2102,7 +2107,7 @@
           <a:p>
             <a:fld id="{8C9D345C-3030-4E84-9DC8-AD7BC6D763D1}" type="datetimeFigureOut">
               <a:rPr lang="en-IN" smtClean="0"/>
-              <a:t>19-04-2026</a:t>
+              <a:t>20-04-2026</a:t>
             </a:fld>
             <a:endParaRPr lang="en-IN"/>
           </a:p>
@@ -2434,7 +2439,7 @@
           <a:p>
             <a:fld id="{8C9D345C-3030-4E84-9DC8-AD7BC6D763D1}" type="datetimeFigureOut">
               <a:rPr lang="en-IN" smtClean="0"/>
-              <a:t>19-04-2026</a:t>
+              <a:t>20-04-2026</a:t>
             </a:fld>
             <a:endParaRPr lang="en-IN"/>
           </a:p>
@@ -2609,7 +2614,7 @@
           <a:p>
             <a:fld id="{8C9D345C-3030-4E84-9DC8-AD7BC6D763D1}" type="datetimeFigureOut">
               <a:rPr lang="en-IN" smtClean="0"/>
-              <a:t>19-04-2026</a:t>
+              <a:t>20-04-2026</a:t>
             </a:fld>
             <a:endParaRPr lang="en-IN"/>
           </a:p>
@@ -2789,7 +2794,7 @@
           <a:p>
             <a:fld id="{8C9D345C-3030-4E84-9DC8-AD7BC6D763D1}" type="datetimeFigureOut">
               <a:rPr lang="en-IN" smtClean="0"/>
-              <a:t>19-04-2026</a:t>
+              <a:t>20-04-2026</a:t>
             </a:fld>
             <a:endParaRPr lang="en-IN"/>
           </a:p>
@@ -2959,7 +2964,7 @@
           <a:p>
             <a:fld id="{8C9D345C-3030-4E84-9DC8-AD7BC6D763D1}" type="datetimeFigureOut">
               <a:rPr lang="en-IN" smtClean="0"/>
-              <a:t>19-04-2026</a:t>
+              <a:t>20-04-2026</a:t>
             </a:fld>
             <a:endParaRPr lang="en-IN"/>
           </a:p>
@@ -3216,7 +3221,7 @@
           <a:p>
             <a:fld id="{8C9D345C-3030-4E84-9DC8-AD7BC6D763D1}" type="datetimeFigureOut">
               <a:rPr lang="en-IN" smtClean="0"/>
-              <a:t>19-04-2026</a:t>
+              <a:t>20-04-2026</a:t>
             </a:fld>
             <a:endParaRPr lang="en-IN"/>
           </a:p>
@@ -3508,7 +3513,7 @@
           <a:p>
             <a:fld id="{8C9D345C-3030-4E84-9DC8-AD7BC6D763D1}" type="datetimeFigureOut">
               <a:rPr lang="en-IN" smtClean="0"/>
-              <a:t>19-04-2026</a:t>
+              <a:t>20-04-2026</a:t>
             </a:fld>
             <a:endParaRPr lang="en-IN"/>
           </a:p>
@@ -3938,7 +3943,7 @@
           <a:p>
             <a:fld id="{8C9D345C-3030-4E84-9DC8-AD7BC6D763D1}" type="datetimeFigureOut">
               <a:rPr lang="en-IN" smtClean="0"/>
-              <a:t>19-04-2026</a:t>
+              <a:t>20-04-2026</a:t>
             </a:fld>
             <a:endParaRPr lang="en-IN"/>
           </a:p>
@@ -4056,7 +4061,7 @@
           <a:p>
             <a:fld id="{8C9D345C-3030-4E84-9DC8-AD7BC6D763D1}" type="datetimeFigureOut">
               <a:rPr lang="en-IN" smtClean="0"/>
-              <a:t>19-04-2026</a:t>
+              <a:t>20-04-2026</a:t>
             </a:fld>
             <a:endParaRPr lang="en-IN"/>
           </a:p>
@@ -4151,7 +4156,7 @@
           <a:p>
             <a:fld id="{8C9D345C-3030-4E84-9DC8-AD7BC6D763D1}" type="datetimeFigureOut">
               <a:rPr lang="en-IN" smtClean="0"/>
-              <a:t>19-04-2026</a:t>
+              <a:t>20-04-2026</a:t>
             </a:fld>
             <a:endParaRPr lang="en-IN"/>
           </a:p>
@@ -4434,7 +4439,7 @@
           <a:p>
             <a:fld id="{8C9D345C-3030-4E84-9DC8-AD7BC6D763D1}" type="datetimeFigureOut">
               <a:rPr lang="en-IN" smtClean="0"/>
-              <a:t>19-04-2026</a:t>
+              <a:t>20-04-2026</a:t>
             </a:fld>
             <a:endParaRPr lang="en-IN"/>
           </a:p>
@@ -4725,7 +4730,7 @@
           <a:p>
             <a:fld id="{8C9D345C-3030-4E84-9DC8-AD7BC6D763D1}" type="datetimeFigureOut">
               <a:rPr lang="en-IN" smtClean="0"/>
-              <a:t>19-04-2026</a:t>
+              <a:t>20-04-2026</a:t>
             </a:fld>
             <a:endParaRPr lang="en-IN"/>
           </a:p>
@@ -4956,7 +4961,7 @@
           <a:p>
             <a:fld id="{8C9D345C-3030-4E84-9DC8-AD7BC6D763D1}" type="datetimeFigureOut">
               <a:rPr lang="en-IN" smtClean="0"/>
-              <a:t>19-04-2026</a:t>
+              <a:t>20-04-2026</a:t>
             </a:fld>
             <a:endParaRPr lang="en-IN"/>
           </a:p>
@@ -6703,7 +6708,7 @@
             <p:ph idx="1"/>
             <p:extLst>
               <p:ext uri="{D42A27DB-BD31-4B8C-83A1-F6EECF244321}">
-                <p14:modId xmlns:p14="http://schemas.microsoft.com/office/powerpoint/2010/main" val="870490652"/>
+                <p14:modId xmlns:p14="http://schemas.microsoft.com/office/powerpoint/2010/main" val="206932805"/>
               </p:ext>
             </p:extLst>
           </p:nvPr>
@@ -6854,6 +6859,111 @@
                       </a:endParaRPr>
                     </a:p>
                     <a:p>
+                      <a:pPr marL="285750" marR="0" lvl="0" indent="-285750" algn="l" defTabSz="457200" rtl="0" eaLnBrk="1" fontAlgn="auto" latinLnBrk="0" hangingPunct="1">
+                        <a:lnSpc>
+                          <a:spcPct val="100000"/>
+                        </a:lnSpc>
+                        <a:spcBef>
+                          <a:spcPts val="0"/>
+                        </a:spcBef>
+                        <a:spcAft>
+                          <a:spcPts val="0"/>
+                        </a:spcAft>
+                        <a:buClrTx/>
+                        <a:buSzTx/>
+                        <a:buFont typeface="Arial" panose="020B0604020202020204" pitchFamily="34" charset="0"/>
+                        <a:buChar char="•"/>
+                        <a:tabLst/>
+                        <a:defRPr/>
+                      </a:pPr>
+                      <a:r>
+                        <a:rPr lang="en-US" b="0" dirty="0">
+                          <a:solidFill>
+                            <a:schemeClr val="bg1"/>
+                          </a:solidFill>
+                        </a:rPr>
+                        <a:t>Co2 &lt; 800 and PM25 &lt;35 - Good</a:t>
+                      </a:r>
+                    </a:p>
+                    <a:p>
+                      <a:pPr marL="285750" marR="0" lvl="0" indent="-285750" algn="l" defTabSz="457200" rtl="0" eaLnBrk="1" fontAlgn="auto" latinLnBrk="0" hangingPunct="1">
+                        <a:lnSpc>
+                          <a:spcPct val="100000"/>
+                        </a:lnSpc>
+                        <a:spcBef>
+                          <a:spcPts val="0"/>
+                        </a:spcBef>
+                        <a:spcAft>
+                          <a:spcPts val="0"/>
+                        </a:spcAft>
+                        <a:buClrTx/>
+                        <a:buSzTx/>
+                        <a:buFont typeface="Arial" panose="020B0604020202020204" pitchFamily="34" charset="0"/>
+                        <a:buChar char="•"/>
+                        <a:tabLst/>
+                        <a:defRPr/>
+                      </a:pPr>
+                      <a:r>
+                        <a:rPr lang="en-US" b="0" dirty="0">
+                          <a:solidFill>
+                            <a:schemeClr val="bg1"/>
+                          </a:solidFill>
+                        </a:rPr>
+                        <a:t>Co2 &lt; 1200 and PM25 &lt;75 - moderate</a:t>
+                      </a:r>
+                    </a:p>
+                    <a:p>
+                      <a:pPr marL="285750" marR="0" lvl="0" indent="-285750" algn="l" defTabSz="457200" rtl="0" eaLnBrk="1" fontAlgn="auto" latinLnBrk="0" hangingPunct="1">
+                        <a:lnSpc>
+                          <a:spcPct val="100000"/>
+                        </a:lnSpc>
+                        <a:spcBef>
+                          <a:spcPts val="0"/>
+                        </a:spcBef>
+                        <a:spcAft>
+                          <a:spcPts val="0"/>
+                        </a:spcAft>
+                        <a:buClrTx/>
+                        <a:buSzTx/>
+                        <a:buFont typeface="Arial" panose="020B0604020202020204" pitchFamily="34" charset="0"/>
+                        <a:buChar char="•"/>
+                        <a:tabLst/>
+                        <a:defRPr/>
+                      </a:pPr>
+                      <a:r>
+                        <a:rPr lang="en-US" b="0" dirty="0">
+                          <a:solidFill>
+                            <a:schemeClr val="bg1"/>
+                          </a:solidFill>
+                        </a:rPr>
+                        <a:t>Co2 &lt; 1600 and PM25 &lt;115 - poor</a:t>
+                      </a:r>
+                    </a:p>
+                    <a:p>
+                      <a:pPr marL="285750" marR="0" lvl="0" indent="-285750" algn="l" defTabSz="457200" rtl="0" eaLnBrk="1" fontAlgn="auto" latinLnBrk="0" hangingPunct="1">
+                        <a:lnSpc>
+                          <a:spcPct val="100000"/>
+                        </a:lnSpc>
+                        <a:spcBef>
+                          <a:spcPts val="0"/>
+                        </a:spcBef>
+                        <a:spcAft>
+                          <a:spcPts val="0"/>
+                        </a:spcAft>
+                        <a:buClrTx/>
+                        <a:buSzTx/>
+                        <a:buFont typeface="Arial" panose="020B0604020202020204" pitchFamily="34" charset="0"/>
+                        <a:buChar char="•"/>
+                        <a:tabLst/>
+                        <a:defRPr/>
+                      </a:pPr>
+                      <a:endParaRPr lang="en-US" b="0" dirty="0">
+                        <a:solidFill>
+                          <a:schemeClr val="bg1"/>
+                        </a:solidFill>
+                      </a:endParaRPr>
+                    </a:p>
+                    <a:p>
                       <a:pPr marL="285750" indent="-285750">
                         <a:buFont typeface="Arial" panose="020B0604020202020204" pitchFamily="34" charset="0"/>
                         <a:buChar char="•"/>
@@ -6895,7 +7005,7 @@
                             <a:schemeClr val="bg1"/>
                           </a:solidFill>
                         </a:rPr>
-                        <a:t>Simulates a digital sound level meter</a:t>
+                        <a:t>Simulates a digital sound level meter like Cirrus CR:162B</a:t>
                       </a:r>
                     </a:p>
                     <a:p>
@@ -6933,6 +7043,73 @@
                         </a:rPr>
                         <a:t>noise_level</a:t>
                       </a:r>
+                      <a:endParaRPr lang="en-IN" b="0" dirty="0">
+                        <a:solidFill>
+                          <a:schemeClr val="bg1"/>
+                        </a:solidFill>
+                      </a:endParaRPr>
+                    </a:p>
+                    <a:p>
+                      <a:pPr marL="285750" indent="-285750">
+                        <a:buFont typeface="Arial" panose="020B0604020202020204" pitchFamily="34" charset="0"/>
+                        <a:buChar char="•"/>
+                      </a:pPr>
+                      <a:r>
+                        <a:rPr lang="en-IN" b="0" dirty="0">
+                          <a:solidFill>
+                            <a:schemeClr val="bg1"/>
+                          </a:solidFill>
+                        </a:rPr>
+                        <a:t>Decibel &lt; 60 - Quiet</a:t>
+                      </a:r>
+                    </a:p>
+                    <a:p>
+                      <a:pPr marL="285750" indent="-285750">
+                        <a:buFont typeface="Arial" panose="020B0604020202020204" pitchFamily="34" charset="0"/>
+                        <a:buChar char="•"/>
+                      </a:pPr>
+                      <a:r>
+                        <a:rPr lang="en-IN" b="0" dirty="0">
+                          <a:solidFill>
+                            <a:schemeClr val="bg1"/>
+                          </a:solidFill>
+                        </a:rPr>
+                        <a:t>Decibel &lt; 85  - Normal</a:t>
+                      </a:r>
+                    </a:p>
+                    <a:p>
+                      <a:pPr marL="285750" indent="-285750">
+                        <a:buFont typeface="Arial" panose="020B0604020202020204" pitchFamily="34" charset="0"/>
+                        <a:buChar char="•"/>
+                      </a:pPr>
+                      <a:r>
+                        <a:rPr lang="en-IN" b="0" dirty="0">
+                          <a:solidFill>
+                            <a:schemeClr val="bg1"/>
+                          </a:solidFill>
+                        </a:rPr>
+                        <a:t>Decibel &lt; 100 – Loud</a:t>
+                      </a:r>
+                    </a:p>
+                    <a:p>
+                      <a:pPr marL="285750" indent="-285750">
+                        <a:buFont typeface="Arial" panose="020B0604020202020204" pitchFamily="34" charset="0"/>
+                        <a:buChar char="•"/>
+                      </a:pPr>
+                      <a:r>
+                        <a:rPr lang="en-IN" b="0" dirty="0">
+                          <a:solidFill>
+                            <a:schemeClr val="bg1"/>
+                          </a:solidFill>
+                        </a:rPr>
+                        <a:t>Anything above that is very loud</a:t>
+                      </a:r>
+                    </a:p>
+                    <a:p>
+                      <a:pPr marL="285750" indent="-285750">
+                        <a:buFont typeface="Arial" panose="020B0604020202020204" pitchFamily="34" charset="0"/>
+                        <a:buChar char="•"/>
+                      </a:pPr>
                       <a:endParaRPr lang="en-IN" b="0" dirty="0">
                         <a:solidFill>
                           <a:schemeClr val="bg1"/>
